--- a/交付物/02-答辩/答辩PPT.pptx
+++ b/交付物/02-答辩/答辩PPT.pptx
@@ -33,6 +33,7 @@
     <p:sldId id="281" r:id="rId27"/>
     <p:sldId id="282" r:id="rId28"/>
     <p:sldId id="283" r:id="rId29"/>
+    <p:sldId id="285" r:id="rId36"/>
     <p:sldId id="284" r:id="rId30"/>
   </p:sldIdLst>
   <p:notesMasterIdLst>
@@ -2918,6 +2919,76 @@
 </p:notes>
 </file>
 
+<file path=ppt/notesSlides/notesSlide30.xml><?xml version="1.0" encoding="utf-8"?>
+<p:notes xmlns:a="http://schemas.openxmlformats.org/drawingml/2006/main" xmlns:p="http://schemas.openxmlformats.org/presentationml/2006/main" xmlns:r="http://schemas.openxmlformats.org/officeDocument/2006/relationships">
+  <p:cSld>
+    <p:spTree>
+      <p:nvGrpSpPr>
+        <p:cNvPr id="1" name=""/>
+        <p:cNvGrpSpPr/>
+        <p:nvPr/>
+      </p:nvGrpSpPr>
+      <p:grpSpPr>
+        <a:xfrm>
+          <a:off x="0" y="0"/>
+          <a:ext cx="0" cy="0"/>
+          <a:chOff x="0" y="0"/>
+          <a:chExt cx="0" cy="0"/>
+        </a:xfrm>
+      </p:grpSpPr>
+      <p:sp>
+        <p:nvSpPr>
+          <p:cNvPr id="2" name="Slide Image Placeholder 1"/>
+          <p:cNvSpPr>
+            <a:spLocks noGrp="1"/>
+          </p:cNvSpPr>
+          <p:nvPr>
+            <p:ph type="sldImg" idx="2"/>
+          </p:nvPr>
+        </p:nvSpPr>
+        <p:spPr/>
+      </p:sp>
+      <p:sp>
+        <p:nvSpPr>
+          <p:cNvPr id="3" name="Notes Placeholder 2"/>
+          <p:cNvSpPr>
+            <a:spLocks noGrp="1"/>
+          </p:cNvSpPr>
+          <p:nvPr>
+            <p:ph type="body" idx="3" sz="quarter"/>
+          </p:nvPr>
+        </p:nvSpPr>
+        <p:spPr/>
+        <p:txBody>
+          <a:bodyPr/>
+          <a:lstStyle/>
+          <a:p>
+            <a:r>
+              <a:t>这一页是我在系统做完之后补的一轮用户测试，也是整套材料里最新的一块。问题不是界面不好看：第一次用真实浏览器完整走一遍就发现，正常使用大约四十秒，就把后端全局限流六十次每分钟的额度用光了；而前端把「被限流」显示成了「没有这家公司」「没有这段数据」——对一个卖点是证据可追溯的系统，这是方向性误读，比样式问题严重得多。改的是两层：一是把一次走查的接口请求从七十五次压到三十四次，靠只读缓存和并发合并；二是让限流可见——横幅、建议等待秒数、一次退避重试，失败不再静默下沉成空态。读数用同一套装置、同一个任务序列对照：四百二十九从十九条降到零条，走查通过项从四十加到四十一，严重项从四条降到一条，提问主链路端到端三十二点四秒。全部截图和每步快照都在交付目录里，可以复跑。</a:t>
+            </a:r>
+          </a:p>
+        </p:txBody>
+      </p:sp>
+      <p:sp>
+        <p:nvSpPr>
+          <p:cNvPr id="4" name="Slide Number Placeholder 3"/>
+          <p:cNvSpPr>
+            <a:spLocks noGrp="1"/>
+          </p:cNvSpPr>
+          <p:nvPr>
+            <p:ph type="sldNum" idx="5" sz="quarter"/>
+          </p:nvPr>
+        </p:nvSpPr>
+        <p:spPr/>
+      </p:sp>
+    </p:spTree>
+  </p:cSld>
+  <p:clrMapOvr>
+    <a:masterClrMapping/>
+  </p:clrMapOvr>
+</p:notes>
+</file>
+
 <file path=ppt/notesSlides/notesSlide4.xml><?xml version="1.0" encoding="utf-8"?>
 <p:notes xmlns:a="http://schemas.openxmlformats.org/drawingml/2006/main" xmlns:r="http://schemas.openxmlformats.org/officeDocument/2006/relationships" xmlns:p="http://schemas.openxmlformats.org/presentationml/2006/main">
   <p:cSld>
@@ -3866,7 +3937,7 @@
                 <a:ea typeface="Microsoft YaHei" pitchFamily="34" charset="-122"/>
                 <a:cs typeface="Microsoft YaHei" pitchFamily="34" charset="-120"/>
               </a:rPr>
-              <a:t>答辩人：〔待填〕　指导教师：〔待填〕　日期：〔待填〕</a:t>
+              <a:t>答辩人：王锦灿　指导教师：徐文莉　日期：2027 年 5 月</a:t>
             </a:r>
             <a:endParaRPr lang="en-US" sz="1800" dirty="0"/>
           </a:p>
@@ -27666,29 +27737,15 @@
 </file>
 
 <file path=ppt/slides/slide29.xml><?xml version="1.0" encoding="utf-8"?>
-<p:sld xmlns:a="http://schemas.openxmlformats.org/drawingml/2006/main" xmlns:r="http://schemas.openxmlformats.org/officeDocument/2006/relationships" xmlns:p="http://schemas.openxmlformats.org/presentationml/2006/main">
-  <p:cSld name="Slide 29">
-    <p:bg>
-      <p:bgPr>
-        <a:solidFill>
-          <a:srgbClr val="FFFFFF"/>
-        </a:solidFill>
-      </p:bgPr>
-    </p:bg>
+<p:sld xmlns:a="http://schemas.openxmlformats.org/drawingml/2006/main" xmlns:p="http://schemas.openxmlformats.org/presentationml/2006/main" xmlns:r="http://schemas.openxmlformats.org/officeDocument/2006/relationships">
+  <p:cSld>
     <p:spTree>
       <p:nvGrpSpPr>
         <p:cNvPr id="1" name=""/>
         <p:cNvGrpSpPr/>
         <p:nvPr/>
       </p:nvGrpSpPr>
-      <p:grpSpPr>
-        <a:xfrm>
-          <a:off x="0" y="0"/>
-          <a:ext cx="0" cy="0"/>
-          <a:chOff x="0" y="0"/>
-          <a:chExt cx="0" cy="0"/>
-        </a:xfrm>
-      </p:grpSpPr>
+      <p:grpSpPr/>
       <p:sp>
         <p:nvSpPr>
           <p:cNvPr id="3" name="Text 0"/>
@@ -27722,7 +27779,7 @@
                 <a:ea typeface="Microsoft YaHei" pitchFamily="34" charset="-122"/>
                 <a:cs typeface="Microsoft YaHei" pitchFamily="34" charset="-120"/>
               </a:rPr>
-              <a:t>致谢</a:t>
+              <a:t>用户测试：从「能跑」到「好用」（可复现读数）</a:t>
             </a:r>
             <a:endParaRPr lang="en-US" sz="3600" dirty="0"/>
           </a:p>
@@ -27754,7 +27811,7 @@
               <a:buChar char="•"/>
             </a:pPr>
             <a:r>
-              <a:rPr lang="en-US" sz="1400" dirty="0">
+              <a:rPr lang="en-US" sz="1300" dirty="0">
                 <a:solidFill>
                   <a:srgbClr val="374151"/>
                 </a:solidFill>
@@ -27762,7 +27819,7 @@
                 <a:ea typeface="Microsoft YaHei" pitchFamily="34" charset="-122"/>
                 <a:cs typeface="Microsoft YaHei" pitchFamily="34" charset="-120"/>
               </a:rPr>
-              <a:t>01　感谢指导教师在选题、口径与审查纪律上的指导</a:t>
+              <a:t>装置　Playwright ＋ Chromium，七任务 T1～T7 真实浏览器走查：逐步骤截屏、文本快照、控制台错误</a:t>
             </a:r>
             <a:endParaRPr lang="en-US" sz="1400" dirty="0"/>
           </a:p>
@@ -27772,7 +27829,7 @@
               <a:buChar char="•"/>
             </a:pPr>
             <a:r>
-              <a:rPr lang="en-US" sz="1400" dirty="0">
+              <a:rPr lang="en-US" sz="1300" dirty="0">
                 <a:solidFill>
                   <a:srgbClr val="374151"/>
                 </a:solidFill>
@@ -27780,7 +27837,7 @@
                 <a:ea typeface="Microsoft YaHei" pitchFamily="34" charset="-122"/>
                 <a:cs typeface="Microsoft YaHei" pitchFamily="34" charset="-120"/>
               </a:rPr>
-              <a:t>02　感谢评审意见帮我补上了对照实验、干预实验与两处评测口径整改</a:t>
+              <a:t>发现　一次走查就把后端 60 次／60 秒额度用光，而前端把「被限流」显示成「没有这家公司」</a:t>
             </a:r>
             <a:endParaRPr lang="en-US" sz="1400" dirty="0"/>
           </a:p>
@@ -27790,7 +27847,7 @@
               <a:buChar char="•"/>
             </a:pPr>
             <a:r>
-              <a:rPr lang="en-US" sz="1400" dirty="0">
+              <a:rPr lang="en-US" sz="1300" dirty="0">
                 <a:solidFill>
                   <a:srgbClr val="374151"/>
                 </a:solidFill>
@@ -27798,7 +27855,7 @@
                 <a:ea typeface="Microsoft YaHei" pitchFamily="34" charset="-122"/>
                 <a:cs typeface="Microsoft YaHei" pitchFamily="34" charset="-120"/>
               </a:rPr>
-              <a:t>03　感谢开源社区：FastAPI ／ Vue ／ Neo4j ／ FAISS</a:t>
+              <a:t>修复　只读缓存 ＋ 并发合并：一次走查 75 → 34 次请求（−54.7%）；限流横幅 ＋ 退避重试，失败不再下沉成空态</a:t>
             </a:r>
             <a:endParaRPr lang="en-US" sz="1400" dirty="0"/>
           </a:p>
@@ -27808,7 +27865,7 @@
               <a:buChar char="•"/>
             </a:pPr>
             <a:r>
-              <a:rPr lang="en-US" sz="1400" dirty="0">
+              <a:rPr lang="en-US" sz="1300" dirty="0">
                 <a:solidFill>
                   <a:srgbClr val="374151"/>
                 </a:solidFill>
@@ -27816,7 +27873,25 @@
                 <a:ea typeface="Microsoft YaHei" pitchFamily="34" charset="-122"/>
                 <a:cs typeface="Microsoft YaHei" pitchFamily="34" charset="-120"/>
               </a:rPr>
-              <a:t>04　请各位老师批评指正</a:t>
+              <a:t>读数　429 由 19 → 0；走查通过 40 → 41；严重项 4 → 1；提问主链路端到端 32.4 s（同一装置、同一任务序列）</a:t>
+            </a:r>
+            <a:endParaRPr lang="en-US" sz="1400" dirty="0"/>
+          </a:p>
+          <a:p>
+            <a:pPr marL="342900" indent="-342900">
+              <a:buSzPct val="100000"/>
+              <a:buChar char="•"/>
+            </a:pPr>
+            <a:r>
+              <a:rPr lang="en-US" sz="1300" dirty="0">
+                <a:solidFill>
+                  <a:srgbClr val="374151"/>
+                </a:solidFill>
+                <a:latin typeface="Microsoft YaHei" pitchFamily="34" charset="0"/>
+                <a:ea typeface="Microsoft YaHei" pitchFamily="34" charset="-122"/>
+                <a:cs typeface="Microsoft YaHei" pitchFamily="34" charset="-120"/>
+              </a:rPr>
+              <a:t>证据　《07-设计与需求/用户测试》4 份 ＋ uat/证据 6 组（优化前／后各一轮，每轮 14 张截图）</a:t>
             </a:r>
             <a:endParaRPr lang="en-US" sz="1400" dirty="0"/>
           </a:p>
@@ -28000,6 +28075,171 @@
                 <a:cs typeface="Microsoft YaHei" pitchFamily="34" charset="-120"/>
               </a:rPr>
               <a:t>边界：不做涨跌预测、不做投资建议、不接实时行情</a:t>
+            </a:r>
+            <a:endParaRPr lang="en-US" sz="1400" dirty="0"/>
+          </a:p>
+        </p:txBody>
+      </p:sp>
+    </p:spTree>
+  </p:cSld>
+  <p:clrMapOvr>
+    <a:masterClrMapping/>
+  </p:clrMapOvr>
+</p:sld>
+</file>
+
+<file path=ppt/slides/slide30.xml><?xml version="1.0" encoding="utf-8"?>
+<p:sld xmlns:a="http://schemas.openxmlformats.org/drawingml/2006/main" xmlns:r="http://schemas.openxmlformats.org/officeDocument/2006/relationships" xmlns:p="http://schemas.openxmlformats.org/presentationml/2006/main">
+  <p:cSld name="Slide 29">
+    <p:bg>
+      <p:bgPr>
+        <a:solidFill>
+          <a:srgbClr val="FFFFFF"/>
+        </a:solidFill>
+      </p:bgPr>
+    </p:bg>
+    <p:spTree>
+      <p:nvGrpSpPr>
+        <p:cNvPr id="1" name=""/>
+        <p:cNvGrpSpPr/>
+        <p:nvPr/>
+      </p:nvGrpSpPr>
+      <p:grpSpPr>
+        <a:xfrm>
+          <a:off x="0" y="0"/>
+          <a:ext cx="0" cy="0"/>
+          <a:chOff x="0" y="0"/>
+          <a:chExt cx="0" cy="0"/>
+        </a:xfrm>
+      </p:grpSpPr>
+      <p:sp>
+        <p:nvSpPr>
+          <p:cNvPr id="3" name="Text 0"/>
+          <p:cNvSpPr/>
+          <p:nvPr/>
+        </p:nvSpPr>
+        <p:spPr>
+          <a:xfrm>
+            <a:off x="457200" y="365760"/>
+            <a:ext cx="10972800" cy="731520"/>
+          </a:xfrm>
+          <a:prstGeom prst="rect">
+            <a:avLst/>
+          </a:prstGeom>
+          <a:noFill/>
+          <a:ln/>
+        </p:spPr>
+        <p:txBody>
+          <a:bodyPr wrap="square" rtlCol="0" anchor="ctr"/>
+          <a:lstStyle/>
+          <a:p>
+            <a:pPr indent="0" marL="0">
+              <a:buNone/>
+            </a:pPr>
+            <a:r>
+              <a:rPr lang="en-US" sz="3600" b="1" dirty="0">
+                <a:solidFill>
+                  <a:srgbClr val="203561"/>
+                </a:solidFill>
+                <a:latin typeface="Microsoft YaHei" pitchFamily="34" charset="0"/>
+                <a:ea typeface="Microsoft YaHei" pitchFamily="34" charset="-122"/>
+                <a:cs typeface="Microsoft YaHei" pitchFamily="34" charset="-120"/>
+              </a:rPr>
+              <a:t>致谢</a:t>
+            </a:r>
+            <a:endParaRPr lang="en-US" sz="3600" dirty="0"/>
+          </a:p>
+        </p:txBody>
+      </p:sp>
+      <p:sp>
+        <p:nvSpPr>
+          <p:cNvPr id="4" name="Text 1"/>
+          <p:cNvSpPr/>
+          <p:nvPr/>
+        </p:nvSpPr>
+        <p:spPr>
+          <a:xfrm>
+            <a:off x="640080" y="1371600"/>
+            <a:ext cx="10363200" cy="3657600"/>
+          </a:xfrm>
+          <a:prstGeom prst="rect">
+            <a:avLst/>
+          </a:prstGeom>
+          <a:noFill/>
+          <a:ln/>
+        </p:spPr>
+        <p:txBody>
+          <a:bodyPr wrap="square" rtlCol="0" anchor="ctr"/>
+          <a:lstStyle/>
+          <a:p>
+            <a:pPr marL="342900" indent="-342900">
+              <a:buSzPct val="100000"/>
+              <a:buChar char="•"/>
+            </a:pPr>
+            <a:r>
+              <a:rPr lang="en-US" sz="1400" dirty="0">
+                <a:solidFill>
+                  <a:srgbClr val="374151"/>
+                </a:solidFill>
+                <a:latin typeface="Microsoft YaHei" pitchFamily="34" charset="0"/>
+                <a:ea typeface="Microsoft YaHei" pitchFamily="34" charset="-122"/>
+                <a:cs typeface="Microsoft YaHei" pitchFamily="34" charset="-120"/>
+              </a:rPr>
+              <a:t>01　感谢指导教师在选题、口径与审查纪律上的指导</a:t>
+            </a:r>
+            <a:endParaRPr lang="en-US" sz="1400" dirty="0"/>
+          </a:p>
+          <a:p>
+            <a:pPr marL="342900" indent="-342900">
+              <a:buSzPct val="100000"/>
+              <a:buChar char="•"/>
+            </a:pPr>
+            <a:r>
+              <a:rPr lang="en-US" sz="1400" dirty="0">
+                <a:solidFill>
+                  <a:srgbClr val="374151"/>
+                </a:solidFill>
+                <a:latin typeface="Microsoft YaHei" pitchFamily="34" charset="0"/>
+                <a:ea typeface="Microsoft YaHei" pitchFamily="34" charset="-122"/>
+                <a:cs typeface="Microsoft YaHei" pitchFamily="34" charset="-120"/>
+              </a:rPr>
+              <a:t>02　感谢评审意见帮我补上了对照实验、干预实验与两处评测口径整改</a:t>
+            </a:r>
+            <a:endParaRPr lang="en-US" sz="1400" dirty="0"/>
+          </a:p>
+          <a:p>
+            <a:pPr marL="342900" indent="-342900">
+              <a:buSzPct val="100000"/>
+              <a:buChar char="•"/>
+            </a:pPr>
+            <a:r>
+              <a:rPr lang="en-US" sz="1400" dirty="0">
+                <a:solidFill>
+                  <a:srgbClr val="374151"/>
+                </a:solidFill>
+                <a:latin typeface="Microsoft YaHei" pitchFamily="34" charset="0"/>
+                <a:ea typeface="Microsoft YaHei" pitchFamily="34" charset="-122"/>
+                <a:cs typeface="Microsoft YaHei" pitchFamily="34" charset="-120"/>
+              </a:rPr>
+              <a:t>03　感谢开源社区：FastAPI ／ Vue ／ Neo4j ／ FAISS</a:t>
+            </a:r>
+            <a:endParaRPr lang="en-US" sz="1400" dirty="0"/>
+          </a:p>
+          <a:p>
+            <a:pPr marL="342900" indent="-342900">
+              <a:buSzPct val="100000"/>
+              <a:buChar char="•"/>
+            </a:pPr>
+            <a:r>
+              <a:rPr lang="en-US" sz="1400" dirty="0">
+                <a:solidFill>
+                  <a:srgbClr val="374151"/>
+                </a:solidFill>
+                <a:latin typeface="Microsoft YaHei" pitchFamily="34" charset="0"/>
+                <a:ea typeface="Microsoft YaHei" pitchFamily="34" charset="-122"/>
+                <a:cs typeface="Microsoft YaHei" pitchFamily="34" charset="-120"/>
+              </a:rPr>
+              <a:t>04　请各位老师批评指正</a:t>
             </a:r>
             <a:endParaRPr lang="en-US" sz="1400" dirty="0"/>
           </a:p>
